--- a/Anomaly_Fraud_Detection.pptx
+++ b/Anomaly_Fraud_Detection.pptx
@@ -15752,8 +15752,8 @@
         </p:nvSpPr>
         <p:spPr>
           <a:xfrm>
-            <a:off x="0" y="0"/>
-            <a:ext cx="8020200" cy="4491990"/>
+            <a:off x="0" y="663405"/>
+            <a:ext cx="8020200" cy="4067895"/>
           </a:xfrm>
           <a:prstGeom prst="rect">
             <a:avLst/>
@@ -15769,38 +15769,6 @@
           </a:bodyPr>
           <a:lstStyle/>
           <a:p>
-            <a:pPr marL="0" marR="0" lvl="0" indent="0" algn="l" rtl="0">
-              <a:spcBef>
-                <a:spcPts val="0"/>
-              </a:spcBef>
-              <a:spcAft>
-                <a:spcPts val="0"/>
-              </a:spcAft>
-              <a:buNone/>
-            </a:pPr>
-            <a:r>
-              <a:rPr lang="en-US" sz="2400" b="1" i="0" u="none" strike="noStrike" cap="none" dirty="0">
-                <a:solidFill>
-                  <a:schemeClr val="dk1"/>
-                </a:solidFill>
-                <a:latin typeface="Calibri"/>
-                <a:ea typeface="Calibri"/>
-                <a:cs typeface="Calibri"/>
-                <a:sym typeface="Calibri"/>
-              </a:rPr>
-              <a:t>Anomaly Detection</a:t>
-            </a:r>
-            <a:endParaRPr sz="2400" b="1" i="0" u="none" strike="noStrike" cap="none" dirty="0">
-              <a:solidFill>
-                <a:schemeClr val="dk1"/>
-              </a:solidFill>
-              <a:latin typeface="Calibri"/>
-              <a:ea typeface="Calibri"/>
-              <a:cs typeface="Calibri"/>
-              <a:sym typeface="Calibri"/>
-            </a:endParaRPr>
-          </a:p>
-          <a:p>
             <a:pPr marL="0" lvl="0" indent="0" algn="l" rtl="0">
               <a:spcBef>
                 <a:spcPts val="0"/>
@@ -15852,7 +15820,31 @@
                 <a:cs typeface="Calibri"/>
                 <a:sym typeface="Calibri"/>
               </a:rPr>
-              <a:t>Examples: fraud, a structural defect, medical problems or errors in a text. </a:t>
+              <a:t>Examples: </a:t>
+            </a:r>
+            <a:r>
+              <a:rPr lang="en-US" sz="1800" b="1" dirty="0">
+                <a:solidFill>
+                  <a:srgbClr val="0070C0"/>
+                </a:solidFill>
+                <a:latin typeface="Calibri"/>
+                <a:ea typeface="Calibri"/>
+                <a:cs typeface="Calibri"/>
+                <a:sym typeface="Calibri"/>
+              </a:rPr>
+              <a:t>fraud</a:t>
+            </a:r>
+            <a:r>
+              <a:rPr lang="en-US" sz="1800" dirty="0">
+                <a:solidFill>
+                  <a:schemeClr val="dk1"/>
+                </a:solidFill>
+                <a:latin typeface="Calibri"/>
+                <a:ea typeface="Calibri"/>
+                <a:cs typeface="Calibri"/>
+                <a:sym typeface="Calibri"/>
+              </a:rPr>
+              <a:t>, a structural defect, medical problems or errors in a text. </a:t>
             </a:r>
             <a:endParaRPr dirty="0"/>
           </a:p>
@@ -16232,8 +16224,13 @@
           <p:nvPr/>
         </p:nvPicPr>
         <p:blipFill>
-          <a:blip r:embed="rId3">
+          <a:blip r:embed="rId3" cstate="email">
             <a:alphaModFix/>
+            <a:extLst>
+              <a:ext uri="{28A0092B-C50C-407E-A947-70E740481C1C}">
+                <a14:useLocalDpi xmlns:a14="http://schemas.microsoft.com/office/drawing/2010/main"/>
+              </a:ext>
+            </a:extLst>
           </a:blip>
           <a:stretch>
             <a:fillRect/>
@@ -16260,8 +16257,13 @@
           <p:nvPr/>
         </p:nvPicPr>
         <p:blipFill>
-          <a:blip r:embed="rId4">
+          <a:blip r:embed="rId4" cstate="email">
             <a:alphaModFix/>
+            <a:extLst>
+              <a:ext uri="{28A0092B-C50C-407E-A947-70E740481C1C}">
+                <a14:useLocalDpi xmlns:a14="http://schemas.microsoft.com/office/drawing/2010/main"/>
+              </a:ext>
+            </a:extLst>
           </a:blip>
           <a:stretch>
             <a:fillRect/>
@@ -16288,8 +16290,13 @@
           <p:nvPr/>
         </p:nvPicPr>
         <p:blipFill>
-          <a:blip r:embed="rId5">
+          <a:blip r:embed="rId5" cstate="email">
             <a:alphaModFix/>
+            <a:extLst>
+              <a:ext uri="{28A0092B-C50C-407E-A947-70E740481C1C}">
+                <a14:useLocalDpi xmlns:a14="http://schemas.microsoft.com/office/drawing/2010/main"/>
+              </a:ext>
+            </a:extLst>
           </a:blip>
           <a:stretch>
             <a:fillRect/>
@@ -16309,6 +16316,49 @@
           </a:ln>
         </p:spPr>
       </p:pic>
+      <p:sp>
+        <p:nvSpPr>
+          <p:cNvPr id="2" name="TextBox 1">
+            <a:extLst>
+              <a:ext uri="{FF2B5EF4-FFF2-40B4-BE49-F238E27FC236}">
+                <a16:creationId xmlns:a16="http://schemas.microsoft.com/office/drawing/2014/main" id="{454B93EE-149F-334C-A7E5-2E6A9DC90DE6}"/>
+              </a:ext>
+            </a:extLst>
+          </p:cNvPr>
+          <p:cNvSpPr txBox="1"/>
+          <p:nvPr/>
+        </p:nvSpPr>
+        <p:spPr>
+          <a:xfrm>
+            <a:off x="0" y="0"/>
+            <a:ext cx="5863771" cy="523220"/>
+          </a:xfrm>
+          <a:prstGeom prst="rect">
+            <a:avLst/>
+          </a:prstGeom>
+          <a:noFill/>
+        </p:spPr>
+        <p:txBody>
+          <a:bodyPr wrap="square" rtlCol="0">
+            <a:spAutoFit/>
+          </a:bodyPr>
+          <a:lstStyle/>
+          <a:p>
+            <a:r>
+              <a:rPr lang="en-US" sz="2800" b="1" dirty="0">
+                <a:solidFill>
+                  <a:schemeClr val="dk1"/>
+                </a:solidFill>
+                <a:latin typeface="Calibri"/>
+                <a:ea typeface="Calibri"/>
+                <a:cs typeface="Calibri"/>
+                <a:sym typeface="Calibri"/>
+              </a:rPr>
+              <a:t>Anomaly Detection, Fraud Detection</a:t>
+            </a:r>
+          </a:p>
+        </p:txBody>
+      </p:sp>
     </p:spTree>
   </p:cSld>
   <p:clrMapOvr>
@@ -16343,7 +16393,7 @@
         <p:spPr>
           <a:xfrm>
             <a:off x="0" y="0"/>
-            <a:ext cx="12001500" cy="5833500"/>
+            <a:ext cx="12001500" cy="6691086"/>
           </a:xfrm>
           <a:prstGeom prst="rect">
             <a:avLst/>
@@ -16369,10 +16419,10 @@
               <a:buNone/>
             </a:pPr>
             <a:r>
-              <a:rPr lang="en-US" sz="3000" b="1"/>
+              <a:rPr lang="en-US" sz="3000" b="1" dirty="0"/>
               <a:t>Outlier Detection methods:</a:t>
             </a:r>
-            <a:endParaRPr sz="3000" b="1"/>
+            <a:endParaRPr sz="3000" b="1" dirty="0"/>
           </a:p>
           <a:p>
             <a:pPr marL="457200" lvl="0" indent="-342900" algn="l" rtl="0">
@@ -16386,10 +16436,10 @@
               <a:buChar char="●"/>
             </a:pPr>
             <a:r>
-              <a:rPr lang="en-US" sz="1800"/>
+              <a:rPr lang="en-US" sz="1800" dirty="0"/>
               <a:t>Density-based techniques (k-nearest neighbor, local outlier factor,  isolation forests, etc.).</a:t>
             </a:r>
-            <a:endParaRPr sz="1800"/>
+            <a:endParaRPr sz="1800" dirty="0"/>
           </a:p>
           <a:p>
             <a:pPr marL="457200" lvl="0" indent="-342900" algn="l" rtl="0">
@@ -16403,10 +16453,10 @@
               <a:buChar char="●"/>
             </a:pPr>
             <a:r>
-              <a:rPr lang="en-US" sz="1800"/>
+              <a:rPr lang="en-US" sz="1800" dirty="0"/>
               <a:t>Subspace- and correlation-based outlier detection for high-dimensional data.</a:t>
             </a:r>
-            <a:endParaRPr sz="1800"/>
+            <a:endParaRPr sz="1800" dirty="0"/>
           </a:p>
           <a:p>
             <a:pPr marL="457200" lvl="0" indent="-342900" algn="l" rtl="0">
@@ -16420,10 +16470,10 @@
               <a:buChar char="●"/>
             </a:pPr>
             <a:r>
-              <a:rPr lang="en-US" sz="1800"/>
+              <a:rPr lang="en-US" sz="1800" dirty="0"/>
               <a:t>One-class support vector machines.</a:t>
             </a:r>
-            <a:endParaRPr sz="1800"/>
+            <a:endParaRPr sz="1800" dirty="0"/>
           </a:p>
           <a:p>
             <a:pPr marL="457200" lvl="0" indent="-342900" algn="l" rtl="0">
@@ -16437,10 +16487,10 @@
               <a:buChar char="●"/>
             </a:pPr>
             <a:r>
-              <a:rPr lang="en-US" sz="1800"/>
+              <a:rPr lang="en-US" sz="1800" dirty="0"/>
               <a:t>Replicator neural networks.</a:t>
             </a:r>
-            <a:endParaRPr sz="1800"/>
+            <a:endParaRPr sz="1800" dirty="0"/>
           </a:p>
           <a:p>
             <a:pPr marL="457200" lvl="0" indent="-342900" algn="l" rtl="0">
@@ -16454,10 +16504,10 @@
               <a:buChar char="●"/>
             </a:pPr>
             <a:r>
-              <a:rPr lang="en-US" sz="1800"/>
+              <a:rPr lang="en-US" sz="1800" dirty="0"/>
               <a:t>Bayesian Networks.</a:t>
             </a:r>
-            <a:endParaRPr sz="1800"/>
+            <a:endParaRPr sz="1800" dirty="0"/>
           </a:p>
           <a:p>
             <a:pPr marL="457200" lvl="0" indent="-342900" algn="l" rtl="0">
@@ -16471,10 +16521,10 @@
               <a:buChar char="●"/>
             </a:pPr>
             <a:r>
-              <a:rPr lang="en-US" sz="1800"/>
+              <a:rPr lang="en-US" sz="1800" dirty="0"/>
               <a:t>Hidden Markov models (HMMs).</a:t>
             </a:r>
-            <a:endParaRPr sz="1800"/>
+            <a:endParaRPr sz="1800" dirty="0"/>
           </a:p>
           <a:p>
             <a:pPr marL="457200" lvl="0" indent="-342900" algn="l" rtl="0">
@@ -16488,10 +16538,10 @@
               <a:buChar char="●"/>
             </a:pPr>
             <a:r>
-              <a:rPr lang="en-US" sz="1800"/>
+              <a:rPr lang="en-US" sz="1800" dirty="0"/>
               <a:t>Cluster analysis-based outlier detection.</a:t>
             </a:r>
-            <a:endParaRPr sz="1800"/>
+            <a:endParaRPr sz="1800" dirty="0"/>
           </a:p>
           <a:p>
             <a:pPr marL="457200" lvl="0" indent="-342900" algn="l" rtl="0">
@@ -16505,10 +16555,18 @@
               <a:buChar char="●"/>
             </a:pPr>
             <a:r>
-              <a:rPr lang="en-US" sz="1800"/>
-              <a:t>Deviations from association rules and frequent itemsets.</a:t>
+              <a:rPr lang="en-US" sz="1800" dirty="0"/>
+              <a:t>Deviations from association rules and frequent </a:t>
             </a:r>
-            <a:endParaRPr sz="1800"/>
+            <a:r>
+              <a:rPr lang="en-US" sz="1800" dirty="0" err="1"/>
+              <a:t>itemsets</a:t>
+            </a:r>
+            <a:r>
+              <a:rPr lang="en-US" sz="1800" dirty="0"/>
+              <a:t>.</a:t>
+            </a:r>
+            <a:endParaRPr sz="1800" dirty="0"/>
           </a:p>
           <a:p>
             <a:pPr marL="457200" lvl="0" indent="-342900" algn="l" rtl="0">
@@ -16522,10 +16580,10 @@
               <a:buChar char="●"/>
             </a:pPr>
             <a:r>
-              <a:rPr lang="en-US" sz="1800"/>
+              <a:rPr lang="en-US" sz="1800" dirty="0"/>
               <a:t>Fuzzy logic-based outlier detection.</a:t>
             </a:r>
-            <a:endParaRPr sz="1800"/>
+            <a:endParaRPr sz="1800" dirty="0"/>
           </a:p>
           <a:p>
             <a:pPr marL="457200" lvl="0" indent="-342900" algn="l" rtl="0">
@@ -16539,10 +16597,34 @@
               <a:buChar char="●"/>
             </a:pPr>
             <a:r>
-              <a:rPr lang="en-US" sz="1800"/>
+              <a:rPr lang="en-US" sz="1800" dirty="0"/>
               <a:t>Ensemble techniques, using feature bagging, score normalization, and different sources of diversity.</a:t>
             </a:r>
-            <a:endParaRPr sz="1800"/>
+          </a:p>
+          <a:p>
+            <a:pPr marL="457200" lvl="0" indent="-342900">
+              <a:buSzPts val="1800"/>
+              <a:buChar char="●"/>
+            </a:pPr>
+            <a:r>
+              <a:rPr lang="en-US" sz="1800" dirty="0" err="1"/>
+              <a:t>Benford's</a:t>
+            </a:r>
+            <a:r>
+              <a:rPr lang="en-US" sz="1800" dirty="0"/>
+              <a:t> law - </a:t>
+            </a:r>
+            <a:r>
+              <a:rPr lang="en-US" sz="1800" dirty="0">
+                <a:hlinkClick r:id="rId3"/>
+              </a:rPr>
+              <a:t>https://en.wikipedia.org/wiki/Benford%27s_law</a:t>
+            </a:r>
+            <a:r>
+              <a:rPr lang="en-US" sz="1800" dirty="0"/>
+              <a:t> - first-digit law, is an observation about the frequency distribution of leading digits in many real-life sets of numerical data. </a:t>
+            </a:r>
+            <a:endParaRPr sz="1800" dirty="0"/>
           </a:p>
           <a:p>
             <a:pPr marL="0" lvl="0" indent="0" algn="l" rtl="0">
@@ -16554,7 +16636,7 @@
               </a:spcAft>
               <a:buNone/>
             </a:pPr>
-            <a:endParaRPr sz="1800"/>
+            <a:endParaRPr lang="en-US" sz="1800" dirty="0"/>
           </a:p>
           <a:p>
             <a:pPr marL="0" lvl="0" indent="0" algn="l" rtl="0">
@@ -16566,11 +16648,7 @@
               </a:spcAft>
               <a:buNone/>
             </a:pPr>
-            <a:r>
-              <a:rPr lang="en-US" sz="2400" b="1"/>
-              <a:t>Application to data security:</a:t>
-            </a:r>
-            <a:endParaRPr sz="2400" b="1"/>
+            <a:endParaRPr sz="1800" dirty="0"/>
           </a:p>
           <a:p>
             <a:pPr marL="0" lvl="0" indent="0" algn="l" rtl="0">
@@ -16583,10 +16661,10 @@
               <a:buNone/>
             </a:pPr>
             <a:r>
-              <a:rPr lang="en-US" sz="1800"/>
-              <a:t>intrusion detection systems using threshold statistics </a:t>
+              <a:rPr lang="en-US" sz="2400" b="1" dirty="0"/>
+              <a:t>Application to data security:</a:t>
             </a:r>
-            <a:endParaRPr sz="1800"/>
+            <a:endParaRPr sz="2400" b="1" dirty="0"/>
           </a:p>
           <a:p>
             <a:pPr marL="0" lvl="0" indent="0" algn="l" rtl="0">
@@ -16599,10 +16677,10 @@
               <a:buNone/>
             </a:pPr>
             <a:r>
-              <a:rPr lang="en-US" sz="1800"/>
-              <a:t>based on profiles of users, workstations, networks, </a:t>
+              <a:rPr lang="en-US" sz="1800" dirty="0"/>
+              <a:t>intrusion detection systems using threshold statistics </a:t>
             </a:r>
-            <a:endParaRPr sz="1800"/>
+            <a:endParaRPr sz="1800" dirty="0"/>
           </a:p>
           <a:p>
             <a:pPr marL="0" lvl="0" indent="0" algn="l" rtl="0">
@@ -16615,10 +16693,10 @@
               <a:buNone/>
             </a:pPr>
             <a:r>
-              <a:rPr lang="en-US" sz="1800"/>
-              <a:t>remote hosts, groups of users, and programs based </a:t>
+              <a:rPr lang="en-US" sz="1800" dirty="0"/>
+              <a:t>based on profiles of users, workstations, networks, </a:t>
             </a:r>
-            <a:endParaRPr sz="1800"/>
+            <a:endParaRPr sz="1800" dirty="0"/>
           </a:p>
           <a:p>
             <a:pPr marL="0" lvl="0" indent="0" algn="l" rtl="0">
@@ -16631,10 +16709,10 @@
               <a:buNone/>
             </a:pPr>
             <a:r>
-              <a:rPr lang="en-US" sz="1800"/>
-              <a:t>on frequencies, means, variances &amp; covariances.</a:t>
+              <a:rPr lang="en-US" sz="1800" dirty="0"/>
+              <a:t>remote hosts, groups of users, and programs based </a:t>
             </a:r>
-            <a:endParaRPr sz="1800"/>
+            <a:endParaRPr sz="1800" dirty="0"/>
           </a:p>
           <a:p>
             <a:pPr marL="0" lvl="0" indent="0" algn="l" rtl="0">
@@ -16646,7 +16724,11 @@
               </a:spcAft>
               <a:buNone/>
             </a:pPr>
-            <a:endParaRPr sz="1800"/>
+            <a:r>
+              <a:rPr lang="en-US" sz="1800" dirty="0"/>
+              <a:t>on frequencies, means, variances &amp; covariances.</a:t>
+            </a:r>
+            <a:endParaRPr sz="1800" dirty="0"/>
           </a:p>
           <a:p>
             <a:pPr marL="0" lvl="0" indent="0" algn="l" rtl="0">
@@ -16658,11 +16740,23 @@
               </a:spcAft>
               <a:buNone/>
             </a:pPr>
+            <a:endParaRPr sz="1800" dirty="0"/>
+          </a:p>
+          <a:p>
+            <a:pPr marL="0" lvl="0" indent="0" algn="l" rtl="0">
+              <a:spcBef>
+                <a:spcPts val="0"/>
+              </a:spcBef>
+              <a:spcAft>
+                <a:spcPts val="0"/>
+              </a:spcAft>
+              <a:buNone/>
+            </a:pPr>
             <a:r>
-              <a:rPr lang="en-US" sz="1800"/>
+              <a:rPr lang="en-US" sz="1800" dirty="0"/>
               <a:t>The counterpart of anomaly detection in intrusion detection is misuse detection.</a:t>
             </a:r>
-            <a:endParaRPr sz="1800"/>
+            <a:endParaRPr sz="1800" dirty="0"/>
           </a:p>
         </p:txBody>
       </p:sp>
@@ -16705,8 +16799,8 @@
         </p:nvSpPr>
         <p:spPr>
           <a:xfrm>
-            <a:off x="206322" y="4571587"/>
-            <a:ext cx="11391254" cy="2031325"/>
+            <a:off x="0" y="4210930"/>
+            <a:ext cx="11391254" cy="2462213"/>
           </a:xfrm>
           <a:prstGeom prst="rect">
             <a:avLst/>
@@ -16792,13 +16886,7 @@
           <a:p>
             <a:r>
               <a:rPr lang="en-US" dirty="0"/>
-              <a:t>Kaggle Credit Card Fraud Data Set </a:t>
-            </a:r>
-          </a:p>
-          <a:p>
-            <a:r>
-              <a:rPr lang="en-US" dirty="0"/>
-              <a:t> - </a:t>
+              <a:t>Kaggle Credit Card Fraud Data Set - </a:t>
             </a:r>
             <a:r>
               <a:rPr lang="en-US" dirty="0">
@@ -16814,7 +16902,55 @@
           <a:p>
             <a:r>
               <a:rPr lang="en-US" dirty="0"/>
-              <a:t>...</a:t>
+              <a:t>Features for Credit Card Fraud Detection - </a:t>
+            </a:r>
+            <a:r>
+              <a:rPr lang="en-US" dirty="0">
+                <a:hlinkClick r:id="rId6"/>
+              </a:rPr>
+              <a:t>https://towardsdatascience.com/how-to-create-good-features-in-fraud-detection-de6562f249ef</a:t>
+            </a:r>
+            <a:r>
+              <a:rPr lang="en-US" dirty="0"/>
+              <a:t>  </a:t>
+            </a:r>
+          </a:p>
+          <a:p>
+            <a:r>
+              <a:rPr lang="en-US" dirty="0"/>
+              <a:t>Feature Engineering for Fraud Detection - </a:t>
+            </a:r>
+            <a:r>
+              <a:rPr lang="en-US" dirty="0">
+                <a:hlinkClick r:id="rId7"/>
+              </a:rPr>
+              <a:t>https://github.com/dachosen1/Feature-Engineering-for-Fraud-Detection</a:t>
+            </a:r>
+            <a:r>
+              <a:rPr lang="en-US" dirty="0"/>
+              <a:t> </a:t>
+            </a:r>
+          </a:p>
+          <a:p>
+            <a:r>
+              <a:rPr lang="en-US" dirty="0"/>
+              <a:t>A Feature Extraction Method for Credit Card Fraud Detection - </a:t>
+            </a:r>
+            <a:r>
+              <a:rPr lang="en-US" dirty="0">
+                <a:hlinkClick r:id="rId8"/>
+              </a:rPr>
+              <a:t>https://ieeexplore.ieee.org/document/8782457</a:t>
+            </a:r>
+            <a:r>
+              <a:rPr lang="en-US" dirty="0"/>
+              <a:t> </a:t>
+            </a:r>
+          </a:p>
+          <a:p>
+            <a:r>
+              <a:rPr lang="en-US" dirty="0"/>
+              <a:t>etc.</a:t>
             </a:r>
           </a:p>
         </p:txBody>
@@ -16833,7 +16969,7 @@
         </p:nvSpPr>
         <p:spPr>
           <a:xfrm>
-            <a:off x="387458" y="433953"/>
+            <a:off x="244548" y="187210"/>
             <a:ext cx="7578671" cy="954107"/>
           </a:xfrm>
           <a:prstGeom prst="rect">
@@ -16886,8 +17022,8 @@
         </p:nvSpPr>
         <p:spPr>
           <a:xfrm>
-            <a:off x="302605" y="1748717"/>
-            <a:ext cx="9128501" cy="2462213"/>
+            <a:off x="244548" y="1445017"/>
+            <a:ext cx="7926995" cy="2462213"/>
           </a:xfrm>
           <a:prstGeom prst="rect">
             <a:avLst/>
@@ -16953,7 +17089,7 @@
                 </a:solidFill>
                 <a:latin typeface="Consolas" panose="020B0609020204030204" pitchFamily="49" charset="0"/>
                 <a:cs typeface="Consolas" panose="020B0609020204030204" pitchFamily="49" charset="0"/>
-                <a:hlinkClick r:id="rId6"/>
+                <a:hlinkClick r:id="rId9"/>
               </a:rPr>
               <a:t>https://</a:t>
             </a:r>
@@ -16964,7 +17100,7 @@
                 </a:solidFill>
                 <a:latin typeface="Consolas" panose="020B0609020204030204" pitchFamily="49" charset="0"/>
                 <a:cs typeface="Consolas" panose="020B0609020204030204" pitchFamily="49" charset="0"/>
-                <a:hlinkClick r:id="rId6"/>
+                <a:hlinkClick r:id="rId9"/>
               </a:rPr>
               <a:t>en.wikipedia.org</a:t>
             </a:r>
@@ -16975,7 +17111,7 @@
                 </a:solidFill>
                 <a:latin typeface="Consolas" panose="020B0609020204030204" pitchFamily="49" charset="0"/>
                 <a:cs typeface="Consolas" panose="020B0609020204030204" pitchFamily="49" charset="0"/>
-                <a:hlinkClick r:id="rId6"/>
+                <a:hlinkClick r:id="rId9"/>
               </a:rPr>
               <a:t>/wiki/Kolmogorov%E2%80%93Smirnov_test</a:t>
             </a:r>
@@ -17017,7 +17153,7 @@
                 </a:solidFill>
                 <a:latin typeface="Consolas" panose="020B0609020204030204" pitchFamily="49" charset="0"/>
                 <a:cs typeface="Consolas" panose="020B0609020204030204" pitchFamily="49" charset="0"/>
-                <a:hlinkClick r:id="rId7"/>
+                <a:hlinkClick r:id="rId10"/>
               </a:rPr>
               <a:t>https://</a:t>
             </a:r>
@@ -17028,7 +17164,7 @@
                 </a:solidFill>
                 <a:latin typeface="Consolas" panose="020B0609020204030204" pitchFamily="49" charset="0"/>
                 <a:cs typeface="Consolas" panose="020B0609020204030204" pitchFamily="49" charset="0"/>
-                <a:hlinkClick r:id="rId7"/>
+                <a:hlinkClick r:id="rId10"/>
               </a:rPr>
               <a:t>stats.stackexchange.com</a:t>
             </a:r>
@@ -17039,7 +17175,7 @@
                 </a:solidFill>
                 <a:latin typeface="Consolas" panose="020B0609020204030204" pitchFamily="49" charset="0"/>
                 <a:cs typeface="Consolas" panose="020B0609020204030204" pitchFamily="49" charset="0"/>
-                <a:hlinkClick r:id="rId7"/>
+                <a:hlinkClick r:id="rId10"/>
               </a:rPr>
               <a:t>/questions/1001/is-</a:t>
             </a:r>
@@ -17050,7 +17186,7 @@
                 </a:solidFill>
                 <a:latin typeface="Consolas" panose="020B0609020204030204" pitchFamily="49" charset="0"/>
                 <a:cs typeface="Consolas" panose="020B0609020204030204" pitchFamily="49" charset="0"/>
-                <a:hlinkClick r:id="rId7"/>
+                <a:hlinkClick r:id="rId10"/>
               </a:rPr>
               <a:t>spearmans</a:t>
             </a:r>
@@ -17061,7 +17197,7 @@
                 </a:solidFill>
                 <a:latin typeface="Consolas" panose="020B0609020204030204" pitchFamily="49" charset="0"/>
                 <a:cs typeface="Consolas" panose="020B0609020204030204" pitchFamily="49" charset="0"/>
-                <a:hlinkClick r:id="rId7"/>
+                <a:hlinkClick r:id="rId10"/>
               </a:rPr>
               <a:t>-correlation</a:t>
             </a:r>
